--- a/회원가입페이지_정재민/3조 [모듈]UI구현_회원가입페이지_정재민.pptx
+++ b/회원가입페이지_정재민/3조 [모듈]UI구현_회원가입페이지_정재민.pptx
@@ -5,11 +5,12 @@
     <p:sldMasterId id="2147483648" r:id="rId1"/>
   </p:sldMasterIdLst>
   <p:notesMasterIdLst>
-    <p:notesMasterId r:id="rId4"/>
+    <p:notesMasterId r:id="rId5"/>
   </p:notesMasterIdLst>
   <p:sldIdLst>
     <p:sldId id="304" r:id="rId2"/>
     <p:sldId id="305" r:id="rId3"/>
+    <p:sldId id="306" r:id="rId4"/>
   </p:sldIdLst>
   <p:sldSz cx="24384000" cy="13716000"/>
   <p:notesSz cx="13716000" cy="24384000"/>
@@ -445,6 +446,114 @@
     <p:extLst>
       <p:ext uri="{BB962C8B-B14F-4D97-AF65-F5344CB8AC3E}">
         <p14:creationId xmlns:p14="http://schemas.microsoft.com/office/powerpoint/2010/main" val="914584984"/>
+      </p:ext>
+    </p:extLst>
+  </p:cSld>
+  <p:clrMapOvr>
+    <a:masterClrMapping/>
+  </p:clrMapOvr>
+</p:notes>
+</file>
+
+<file path=ppt/notesSlides/notesSlide3.xml><?xml version="1.0" encoding="utf-8"?>
+<p:notes xmlns:a="http://schemas.openxmlformats.org/drawingml/2006/main" xmlns:r="http://schemas.openxmlformats.org/officeDocument/2006/relationships" xmlns:p="http://schemas.openxmlformats.org/presentationml/2006/main">
+  <p:cSld>
+    <p:spTree>
+      <p:nvGrpSpPr>
+        <p:cNvPr id="1" name="">
+          <a:extLst>
+            <a:ext uri="{FF2B5EF4-FFF2-40B4-BE49-F238E27FC236}">
+              <a16:creationId xmlns:a16="http://schemas.microsoft.com/office/drawing/2014/main" id="{6BF9381E-432E-5A4C-42E6-3552C1BFA3F4}"/>
+            </a:ext>
+          </a:extLst>
+        </p:cNvPr>
+        <p:cNvGrpSpPr/>
+        <p:nvPr/>
+      </p:nvGrpSpPr>
+      <p:grpSpPr>
+        <a:xfrm>
+          <a:off x="0" y="0"/>
+          <a:ext cx="0" cy="0"/>
+          <a:chOff x="0" y="0"/>
+          <a:chExt cx="0" cy="0"/>
+        </a:xfrm>
+      </p:grpSpPr>
+      <p:sp>
+        <p:nvSpPr>
+          <p:cNvPr id="2" name="Slide Image Placeholder 1">
+            <a:extLst>
+              <a:ext uri="{FF2B5EF4-FFF2-40B4-BE49-F238E27FC236}">
+                <a16:creationId xmlns:a16="http://schemas.microsoft.com/office/drawing/2014/main" id="{657EC33D-F08A-BB69-747E-813B86BEFAE9}"/>
+              </a:ext>
+            </a:extLst>
+          </p:cNvPr>
+          <p:cNvSpPr>
+            <a:spLocks noGrp="1" noRot="1" noChangeAspect="1"/>
+          </p:cNvSpPr>
+          <p:nvPr>
+            <p:ph type="sldImg"/>
+          </p:nvPr>
+        </p:nvSpPr>
+        <p:spPr/>
+      </p:sp>
+      <p:sp>
+        <p:nvSpPr>
+          <p:cNvPr id="3" name="Notes Placeholder 2">
+            <a:extLst>
+              <a:ext uri="{FF2B5EF4-FFF2-40B4-BE49-F238E27FC236}">
+                <a16:creationId xmlns:a16="http://schemas.microsoft.com/office/drawing/2014/main" id="{7CA2DD2C-08EF-98BC-331B-51159C947EFF}"/>
+              </a:ext>
+            </a:extLst>
+          </p:cNvPr>
+          <p:cNvSpPr>
+            <a:spLocks noGrp="1"/>
+          </p:cNvSpPr>
+          <p:nvPr>
+            <p:ph type="body" idx="1"/>
+          </p:nvPr>
+        </p:nvSpPr>
+        <p:spPr/>
+        <p:txBody>
+          <a:bodyPr/>
+          <a:lstStyle/>
+          <a:p>
+            <a:endParaRPr lang="en-US" dirty="0"/>
+          </a:p>
+        </p:txBody>
+      </p:sp>
+      <p:sp>
+        <p:nvSpPr>
+          <p:cNvPr id="4" name="Slide Number Placeholder 3">
+            <a:extLst>
+              <a:ext uri="{FF2B5EF4-FFF2-40B4-BE49-F238E27FC236}">
+                <a16:creationId xmlns:a16="http://schemas.microsoft.com/office/drawing/2014/main" id="{65CFE2C5-62A2-0254-1763-E11D5BF54B69}"/>
+              </a:ext>
+            </a:extLst>
+          </p:cNvPr>
+          <p:cNvSpPr>
+            <a:spLocks noGrp="1"/>
+          </p:cNvSpPr>
+          <p:nvPr>
+            <p:ph type="sldNum" sz="quarter" idx="10"/>
+          </p:nvPr>
+        </p:nvSpPr>
+        <p:spPr/>
+        <p:txBody>
+          <a:bodyPr/>
+          <a:lstStyle/>
+          <a:p>
+            <a:fld id="{F7021451-1387-4CA6-816F-3879F97B5CBC}" type="slidenum">
+              <a:rPr lang="en-US"/>
+              <a:t>3</a:t>
+            </a:fld>
+            <a:endParaRPr lang="en-US"/>
+          </a:p>
+        </p:txBody>
+      </p:sp>
+    </p:spTree>
+    <p:extLst>
+      <p:ext uri="{BB962C8B-B14F-4D97-AF65-F5344CB8AC3E}">
+        <p14:creationId xmlns:p14="http://schemas.microsoft.com/office/powerpoint/2010/main" val="2858739817"/>
       </p:ext>
     </p:extLst>
   </p:cSld>
@@ -2402,7 +2511,54 @@
                   <a:latin typeface="+mj-ea"/>
                   <a:ea typeface="+mj-ea"/>
                 </a:rPr>
-                <a:t>회원가입페이지</a:t>
+                <a:t>회원가입페이지 </a:t>
+              </a:r>
+              <a:r>
+                <a:rPr lang="en-US" altLang="ko-KR" sz="6600" b="1" kern="0" dirty="0">
+                  <a:solidFill>
+                    <a:srgbClr val="1A202C"/>
+                  </a:solidFill>
+                  <a:latin typeface="+mj-ea"/>
+                  <a:ea typeface="+mj-ea"/>
+                </a:rPr>
+                <a:t>UI</a:t>
+              </a:r>
+              <a:r>
+                <a:rPr lang="ko-KR" altLang="en-US" sz="6600" b="1" kern="0" dirty="0">
+                  <a:solidFill>
+                    <a:srgbClr val="1A202C"/>
+                  </a:solidFill>
+                  <a:latin typeface="+mj-ea"/>
+                  <a:ea typeface="+mj-ea"/>
+                </a:rPr>
+                <a:t>구현</a:t>
+              </a:r>
+              <a:r>
+                <a:rPr lang="en-US" altLang="ko-KR" sz="6600" b="1" kern="0" dirty="0">
+                  <a:solidFill>
+                    <a:srgbClr val="1A202C"/>
+                  </a:solidFill>
+                  <a:latin typeface="+mj-ea"/>
+                  <a:ea typeface="+mj-ea"/>
+                </a:rPr>
+                <a:t>_</a:t>
+              </a:r>
+              <a:r>
+                <a:rPr kumimoji="0" lang="ko-KR" altLang="en-US" sz="6600" b="1" i="0" u="none" strike="noStrike" kern="0" cap="none" spc="0" normalizeH="0" baseline="0" noProof="0" dirty="0" err="1">
+                  <a:ln>
+                    <a:noFill/>
+                  </a:ln>
+                  <a:solidFill>
+                    <a:srgbClr val="1A202C"/>
+                  </a:solidFill>
+                  <a:effectLst/>
+                  <a:uLnTx/>
+                  <a:uFillTx/>
+                  <a:latin typeface="+mj-ea"/>
+                  <a:ea typeface="+mj-ea"/>
+                  <a:cs typeface="+mn-cs"/>
+                </a:rPr>
+                <a:t>컨텐츠영역</a:t>
               </a:r>
               <a:r>
                 <a:rPr kumimoji="0" lang="ko-KR" altLang="en-US" sz="6600" b="1" i="0" u="none" strike="noStrike" kern="0" cap="none" spc="0" normalizeH="0" baseline="0" noProof="0" dirty="0">
@@ -2419,7 +2575,7 @@
                   <a:ea typeface="+mj-ea"/>
                   <a:cs typeface="+mn-cs"/>
                 </a:rPr>
-                <a:t> 컨텐츠 </a:t>
+                <a:t> </a:t>
               </a:r>
             </a:p>
           </p:txBody>
@@ -3687,6 +3843,920 @@
     <p:extLst>
       <p:ext uri="{BB962C8B-B14F-4D97-AF65-F5344CB8AC3E}">
         <p14:creationId xmlns:p14="http://schemas.microsoft.com/office/powerpoint/2010/main" val="3620197893"/>
+      </p:ext>
+    </p:extLst>
+  </p:cSld>
+  <p:clrMapOvr>
+    <a:masterClrMapping/>
+  </p:clrMapOvr>
+</p:sld>
+</file>
+
+<file path=ppt/slides/slide3.xml><?xml version="1.0" encoding="utf-8"?>
+<p:sld xmlns:a="http://schemas.openxmlformats.org/drawingml/2006/main" xmlns:r="http://schemas.openxmlformats.org/officeDocument/2006/relationships" xmlns:p="http://schemas.openxmlformats.org/presentationml/2006/main">
+  <p:cSld>
+    <p:spTree>
+      <p:nvGrpSpPr>
+        <p:cNvPr id="1" name="">
+          <a:extLst>
+            <a:ext uri="{FF2B5EF4-FFF2-40B4-BE49-F238E27FC236}">
+              <a16:creationId xmlns:a16="http://schemas.microsoft.com/office/drawing/2014/main" id="{76917C56-300A-17ED-33B5-BF1C4D1B89C9}"/>
+            </a:ext>
+          </a:extLst>
+        </p:cNvPr>
+        <p:cNvGrpSpPr/>
+        <p:nvPr/>
+      </p:nvGrpSpPr>
+      <p:grpSpPr>
+        <a:xfrm>
+          <a:off x="0" y="0"/>
+          <a:ext cx="0" cy="0"/>
+          <a:chOff x="0" y="0"/>
+          <a:chExt cx="0" cy="0"/>
+        </a:xfrm>
+      </p:grpSpPr>
+      <p:sp>
+        <p:nvSpPr>
+          <p:cNvPr id="24" name="직사각형 23">
+            <a:extLst>
+              <a:ext uri="{FF2B5EF4-FFF2-40B4-BE49-F238E27FC236}">
+                <a16:creationId xmlns:a16="http://schemas.microsoft.com/office/drawing/2014/main" id="{AF113D1E-EAD2-44F6-A66F-9C8565FCF6B1}"/>
+              </a:ext>
+            </a:extLst>
+          </p:cNvPr>
+          <p:cNvSpPr/>
+          <p:nvPr/>
+        </p:nvSpPr>
+        <p:spPr>
+          <a:xfrm>
+            <a:off x="-116114" y="-170024"/>
+            <a:ext cx="25011529" cy="13991681"/>
+          </a:xfrm>
+          <a:prstGeom prst="rect">
+            <a:avLst/>
+          </a:prstGeom>
+          <a:solidFill>
+            <a:srgbClr val="1A202C"/>
+          </a:solidFill>
+        </p:spPr>
+        <p:style>
+          <a:lnRef idx="2">
+            <a:schemeClr val="accent1">
+              <a:shade val="50000"/>
+            </a:schemeClr>
+          </a:lnRef>
+          <a:fillRef idx="1">
+            <a:schemeClr val="accent1"/>
+          </a:fillRef>
+          <a:effectRef idx="0">
+            <a:schemeClr val="accent1"/>
+          </a:effectRef>
+          <a:fontRef idx="minor">
+            <a:schemeClr val="lt1"/>
+          </a:fontRef>
+        </p:style>
+        <p:txBody>
+          <a:bodyPr rtlCol="0" anchor="b"/>
+          <a:lstStyle/>
+          <a:p>
+            <a:r>
+              <a:rPr lang="en-US" altLang="ko-KR" sz="4400" dirty="0">
+                <a:solidFill>
+                  <a:schemeClr val="bg1"/>
+                </a:solidFill>
+                <a:latin typeface="+mj-ea"/>
+                <a:ea typeface="+mj-ea"/>
+              </a:rPr>
+              <a:t>    </a:t>
+            </a:r>
+            <a:endParaRPr lang="ko-KR" altLang="en-US" sz="4400" dirty="0">
+              <a:solidFill>
+                <a:schemeClr val="bg1"/>
+              </a:solidFill>
+              <a:latin typeface="+mj-ea"/>
+              <a:ea typeface="+mj-ea"/>
+            </a:endParaRPr>
+          </a:p>
+        </p:txBody>
+      </p:sp>
+      <p:pic>
+        <p:nvPicPr>
+          <p:cNvPr id="15" name="Image 13" descr="preencoded.png">
+            <a:extLst>
+              <a:ext uri="{FF2B5EF4-FFF2-40B4-BE49-F238E27FC236}">
+                <a16:creationId xmlns:a16="http://schemas.microsoft.com/office/drawing/2014/main" id="{499BD6B6-2335-C559-1793-44A0D545EBA5}"/>
+              </a:ext>
+            </a:extLst>
+          </p:cNvPr>
+          <p:cNvPicPr>
+            <a:picLocks noChangeAspect="1"/>
+          </p:cNvPicPr>
+          <p:nvPr/>
+        </p:nvPicPr>
+        <p:blipFill>
+          <a:blip r:embed="rId3"/>
+          <a:stretch>
+            <a:fillRect/>
+          </a:stretch>
+        </p:blipFill>
+        <p:spPr>
+          <a:xfrm>
+            <a:off x="909638" y="624858"/>
+            <a:ext cx="2782570" cy="827632"/>
+          </a:xfrm>
+          <a:prstGeom prst="rect">
+            <a:avLst/>
+          </a:prstGeom>
+        </p:spPr>
+      </p:pic>
+      <p:pic>
+        <p:nvPicPr>
+          <p:cNvPr id="23" name="Image 21" descr="preencoded.png">
+            <a:extLst>
+              <a:ext uri="{FF2B5EF4-FFF2-40B4-BE49-F238E27FC236}">
+                <a16:creationId xmlns:a16="http://schemas.microsoft.com/office/drawing/2014/main" id="{FC91609E-65DA-635C-EA51-641AC494C673}"/>
+              </a:ext>
+            </a:extLst>
+          </p:cNvPr>
+          <p:cNvPicPr>
+            <a:picLocks noChangeAspect="1"/>
+          </p:cNvPicPr>
+          <p:nvPr/>
+        </p:nvPicPr>
+        <p:blipFill>
+          <a:blip r:embed="rId4"/>
+          <a:stretch>
+            <a:fillRect/>
+          </a:stretch>
+        </p:blipFill>
+        <p:spPr>
+          <a:xfrm>
+            <a:off x="18163286" y="732264"/>
+            <a:ext cx="5312410" cy="694143"/>
+          </a:xfrm>
+          <a:prstGeom prst="rect">
+            <a:avLst/>
+          </a:prstGeom>
+        </p:spPr>
+      </p:pic>
+      <p:grpSp>
+        <p:nvGrpSpPr>
+          <p:cNvPr id="4" name="그룹 3">
+            <a:extLst>
+              <a:ext uri="{FF2B5EF4-FFF2-40B4-BE49-F238E27FC236}">
+                <a16:creationId xmlns:a16="http://schemas.microsoft.com/office/drawing/2014/main" id="{5468BA22-3BD1-0AC4-0795-8D77550EEC52}"/>
+              </a:ext>
+            </a:extLst>
+          </p:cNvPr>
+          <p:cNvGrpSpPr/>
+          <p:nvPr/>
+        </p:nvGrpSpPr>
+        <p:grpSpPr>
+          <a:xfrm>
+            <a:off x="-648067" y="-170024"/>
+            <a:ext cx="25680134" cy="3023324"/>
+            <a:chOff x="-611040" y="11489982"/>
+            <a:chExt cx="25041517" cy="3023324"/>
+          </a:xfrm>
+        </p:grpSpPr>
+        <p:sp>
+          <p:nvSpPr>
+            <p:cNvPr id="5" name="직사각형 4">
+              <a:extLst>
+                <a:ext uri="{FF2B5EF4-FFF2-40B4-BE49-F238E27FC236}">
+                  <a16:creationId xmlns:a16="http://schemas.microsoft.com/office/drawing/2014/main" id="{F6B4BDE1-50F5-D9DE-3357-F7E6C5841312}"/>
+                </a:ext>
+              </a:extLst>
+            </p:cNvPr>
+            <p:cNvSpPr/>
+            <p:nvPr/>
+          </p:nvSpPr>
+          <p:spPr>
+            <a:xfrm>
+              <a:off x="-611040" y="11489982"/>
+              <a:ext cx="25041517" cy="3023324"/>
+            </a:xfrm>
+            <a:prstGeom prst="rect">
+              <a:avLst/>
+            </a:prstGeom>
+            <a:solidFill>
+              <a:sysClr val="window" lastClr="FFFFFF"/>
+            </a:solidFill>
+            <a:ln w="12700" cap="flat" cmpd="sng" algn="ctr">
+              <a:noFill/>
+              <a:prstDash val="solid"/>
+              <a:miter lim="800000"/>
+            </a:ln>
+            <a:effectLst/>
+          </p:spPr>
+          <p:txBody>
+            <a:bodyPr rtlCol="0" anchor="ctr"/>
+            <a:lstStyle/>
+            <a:p>
+              <a:pPr marL="0" marR="0" lvl="0" indent="0" algn="ctr" defTabSz="914400" eaLnBrk="1" fontAlgn="auto" latinLnBrk="0" hangingPunct="1">
+                <a:lnSpc>
+                  <a:spcPct val="100000"/>
+                </a:lnSpc>
+                <a:spcBef>
+                  <a:spcPts val="0"/>
+                </a:spcBef>
+                <a:spcAft>
+                  <a:spcPts val="0"/>
+                </a:spcAft>
+                <a:buClrTx/>
+                <a:buSzTx/>
+                <a:buFontTx/>
+                <a:buNone/>
+                <a:tabLst/>
+                <a:defRPr/>
+              </a:pPr>
+              <a:r>
+                <a:rPr kumimoji="0" lang="en-US" altLang="ko-KR" sz="6600" b="1" i="0" u="none" strike="noStrike" kern="0" cap="none" spc="0" normalizeH="0" baseline="0" noProof="0" dirty="0">
+                  <a:ln>
+                    <a:noFill/>
+                  </a:ln>
+                  <a:solidFill>
+                    <a:srgbClr val="1A202C"/>
+                  </a:solidFill>
+                  <a:effectLst/>
+                  <a:uLnTx/>
+                  <a:uFillTx/>
+                  <a:latin typeface="+mj-ea"/>
+                  <a:ea typeface="+mj-ea"/>
+                  <a:cs typeface="+mn-cs"/>
+                </a:rPr>
+                <a:t>00. </a:t>
+              </a:r>
+              <a:r>
+                <a:rPr lang="ko-KR" altLang="en-US" sz="6600" b="1" kern="0" dirty="0">
+                  <a:solidFill>
+                    <a:srgbClr val="1A202C"/>
+                  </a:solidFill>
+                  <a:latin typeface="+mj-ea"/>
+                  <a:ea typeface="+mj-ea"/>
+                </a:rPr>
+                <a:t>회원가입페이지</a:t>
+              </a:r>
+              <a:r>
+                <a:rPr lang="en-US" altLang="ko-KR" sz="6600" b="1" kern="0" dirty="0">
+                  <a:solidFill>
+                    <a:srgbClr val="1A202C"/>
+                  </a:solidFill>
+                  <a:latin typeface="+mj-ea"/>
+                  <a:ea typeface="+mj-ea"/>
+                </a:rPr>
+                <a:t> UI</a:t>
+              </a:r>
+              <a:r>
+                <a:rPr lang="ko-KR" altLang="en-US" sz="6600" b="1" kern="0" dirty="0">
+                  <a:solidFill>
+                    <a:srgbClr val="1A202C"/>
+                  </a:solidFill>
+                  <a:latin typeface="+mj-ea"/>
+                  <a:ea typeface="+mj-ea"/>
+                </a:rPr>
+                <a:t>구현</a:t>
+              </a:r>
+              <a:r>
+                <a:rPr lang="en-US" altLang="ko-KR" sz="6600" b="1" kern="0" dirty="0">
+                  <a:solidFill>
+                    <a:srgbClr val="1A202C"/>
+                  </a:solidFill>
+                  <a:latin typeface="+mj-ea"/>
+                  <a:ea typeface="+mj-ea"/>
+                </a:rPr>
+                <a:t> _(Width</a:t>
+              </a:r>
+              <a:r>
+                <a:rPr lang="ko-KR" altLang="en-US" sz="6600" b="1" kern="0" dirty="0">
+                  <a:solidFill>
+                    <a:srgbClr val="1A202C"/>
+                  </a:solidFill>
+                  <a:latin typeface="+mj-ea"/>
+                  <a:ea typeface="+mj-ea"/>
+                </a:rPr>
+                <a:t> </a:t>
+              </a:r>
+              <a:r>
+                <a:rPr lang="en-US" altLang="ko-KR" sz="6600" b="1" kern="0" dirty="0">
+                  <a:solidFill>
+                    <a:srgbClr val="1A202C"/>
+                  </a:solidFill>
+                  <a:latin typeface="+mj-ea"/>
+                  <a:ea typeface="+mj-ea"/>
+                </a:rPr>
+                <a:t>910px</a:t>
+              </a:r>
+              <a:r>
+                <a:rPr lang="ko-KR" altLang="en-US" sz="6600" b="1" kern="0" dirty="0">
+                  <a:solidFill>
+                    <a:srgbClr val="1A202C"/>
+                  </a:solidFill>
+                  <a:latin typeface="+mj-ea"/>
+                  <a:ea typeface="+mj-ea"/>
+                </a:rPr>
+                <a:t>이하</a:t>
+              </a:r>
+              <a:r>
+                <a:rPr lang="en-US" altLang="ko-KR" sz="6600" b="1" kern="0" dirty="0">
+                  <a:solidFill>
+                    <a:srgbClr val="1A202C"/>
+                  </a:solidFill>
+                  <a:latin typeface="+mj-ea"/>
+                  <a:ea typeface="+mj-ea"/>
+                </a:rPr>
+                <a:t>)</a:t>
+              </a:r>
+              <a:endParaRPr kumimoji="0" lang="ko-KR" altLang="en-US" sz="6600" b="1" i="0" u="none" strike="noStrike" kern="0" cap="none" spc="0" normalizeH="0" baseline="0" noProof="0" dirty="0">
+                <a:ln>
+                  <a:noFill/>
+                </a:ln>
+                <a:solidFill>
+                  <a:srgbClr val="1A202C"/>
+                </a:solidFill>
+                <a:effectLst/>
+                <a:uLnTx/>
+                <a:uFillTx/>
+                <a:latin typeface="+mj-ea"/>
+                <a:ea typeface="+mj-ea"/>
+                <a:cs typeface="+mn-cs"/>
+              </a:endParaRPr>
+            </a:p>
+          </p:txBody>
+        </p:sp>
+        <p:pic>
+          <p:nvPicPr>
+            <p:cNvPr id="12" name="그림 11">
+              <a:extLst>
+                <a:ext uri="{FF2B5EF4-FFF2-40B4-BE49-F238E27FC236}">
+                  <a16:creationId xmlns:a16="http://schemas.microsoft.com/office/drawing/2014/main" id="{31DF70C4-9030-4940-86AD-A29DD4D653E5}"/>
+                </a:ext>
+                <a:ext uri="{C183D7F6-B498-43B3-948B-1728B52AA6E4}">
+                  <adec:decorative xmlns:adec="http://schemas.microsoft.com/office/drawing/2017/decorative" val="0"/>
+                </a:ext>
+              </a:extLst>
+            </p:cNvPr>
+            <p:cNvPicPr>
+              <a:picLocks noChangeAspect="1"/>
+            </p:cNvPicPr>
+            <p:nvPr/>
+          </p:nvPicPr>
+          <p:blipFill>
+            <a:blip r:embed="rId5"/>
+            <a:stretch>
+              <a:fillRect/>
+            </a:stretch>
+          </p:blipFill>
+          <p:spPr>
+            <a:xfrm>
+              <a:off x="703817" y="12180880"/>
+              <a:ext cx="1641527" cy="1641527"/>
+            </a:xfrm>
+            <a:prstGeom prst="rect">
+              <a:avLst/>
+            </a:prstGeom>
+          </p:spPr>
+        </p:pic>
+      </p:grpSp>
+      <p:sp>
+        <p:nvSpPr>
+          <p:cNvPr id="16" name="직사각형 15">
+            <a:extLst>
+              <a:ext uri="{FF2B5EF4-FFF2-40B4-BE49-F238E27FC236}">
+                <a16:creationId xmlns:a16="http://schemas.microsoft.com/office/drawing/2014/main" id="{C270A1DD-9552-A840-3DE0-F15EC9E34363}"/>
+              </a:ext>
+            </a:extLst>
+          </p:cNvPr>
+          <p:cNvSpPr/>
+          <p:nvPr/>
+        </p:nvSpPr>
+        <p:spPr>
+          <a:xfrm>
+            <a:off x="21846158" y="12477977"/>
+            <a:ext cx="1786234" cy="1719483"/>
+          </a:xfrm>
+          <a:prstGeom prst="rect">
+            <a:avLst/>
+          </a:prstGeom>
+          <a:solidFill>
+            <a:schemeClr val="bg1"/>
+          </a:solidFill>
+          <a:ln>
+            <a:solidFill>
+              <a:schemeClr val="bg1"/>
+            </a:solidFill>
+          </a:ln>
+        </p:spPr>
+        <p:style>
+          <a:lnRef idx="2">
+            <a:schemeClr val="accent1">
+              <a:shade val="50000"/>
+            </a:schemeClr>
+          </a:lnRef>
+          <a:fillRef idx="1">
+            <a:schemeClr val="accent1"/>
+          </a:fillRef>
+          <a:effectRef idx="0">
+            <a:schemeClr val="accent1"/>
+          </a:effectRef>
+          <a:fontRef idx="minor">
+            <a:schemeClr val="lt1"/>
+          </a:fontRef>
+        </p:style>
+        <p:txBody>
+          <a:bodyPr rtlCol="0" anchor="t"/>
+          <a:lstStyle/>
+          <a:p>
+            <a:pPr algn="ctr"/>
+            <a:r>
+              <a:rPr lang="en-US" altLang="ko-KR" sz="3200" b="1" dirty="0">
+                <a:solidFill>
+                  <a:srgbClr val="1A202C"/>
+                </a:solidFill>
+                <a:latin typeface="+mn-ea"/>
+              </a:rPr>
+              <a:t>00P </a:t>
+            </a:r>
+          </a:p>
+          <a:p>
+            <a:pPr algn="ctr"/>
+            <a:r>
+              <a:rPr lang="ko-KR" altLang="en-US" sz="3200" b="1" dirty="0">
+                <a:solidFill>
+                  <a:srgbClr val="1A202C"/>
+                </a:solidFill>
+                <a:latin typeface="+mn-ea"/>
+              </a:rPr>
+              <a:t>정재민</a:t>
+            </a:r>
+          </a:p>
+        </p:txBody>
+      </p:sp>
+      <p:pic>
+        <p:nvPicPr>
+          <p:cNvPr id="6" name="그림 5">
+            <a:extLst>
+              <a:ext uri="{FF2B5EF4-FFF2-40B4-BE49-F238E27FC236}">
+                <a16:creationId xmlns:a16="http://schemas.microsoft.com/office/drawing/2014/main" id="{E52CC76F-C9CD-461D-946D-E03668082C7F}"/>
+              </a:ext>
+            </a:extLst>
+          </p:cNvPr>
+          <p:cNvPicPr>
+            <a:picLocks noChangeAspect="1"/>
+          </p:cNvPicPr>
+          <p:nvPr/>
+        </p:nvPicPr>
+        <p:blipFill rotWithShape="1">
+          <a:blip r:embed="rId6"/>
+          <a:srcRect l="13196" r="11031"/>
+          <a:stretch/>
+        </p:blipFill>
+        <p:spPr>
+          <a:xfrm>
+            <a:off x="0" y="5495430"/>
+            <a:ext cx="6662475" cy="4340417"/>
+          </a:xfrm>
+          <a:prstGeom prst="rect">
+            <a:avLst/>
+          </a:prstGeom>
+          <a:ln w="28575">
+            <a:solidFill>
+              <a:schemeClr val="bg1"/>
+            </a:solidFill>
+          </a:ln>
+        </p:spPr>
+      </p:pic>
+      <p:sp>
+        <p:nvSpPr>
+          <p:cNvPr id="30" name="TextBox 29">
+            <a:extLst>
+              <a:ext uri="{FF2B5EF4-FFF2-40B4-BE49-F238E27FC236}">
+                <a16:creationId xmlns:a16="http://schemas.microsoft.com/office/drawing/2014/main" id="{294A47DA-84C7-41A2-BC86-CF5AA2A78624}"/>
+              </a:ext>
+            </a:extLst>
+          </p:cNvPr>
+          <p:cNvSpPr txBox="1"/>
+          <p:nvPr/>
+        </p:nvSpPr>
+        <p:spPr>
+          <a:xfrm>
+            <a:off x="14167971" y="4393259"/>
+            <a:ext cx="8854821" cy="5826018"/>
+          </a:xfrm>
+          <a:prstGeom prst="rect">
+            <a:avLst/>
+          </a:prstGeom>
+          <a:noFill/>
+        </p:spPr>
+        <p:txBody>
+          <a:bodyPr wrap="square" rtlCol="0">
+            <a:spAutoFit/>
+          </a:bodyPr>
+          <a:lstStyle/>
+          <a:p>
+            <a:pPr marL="457200" indent="-457200">
+              <a:lnSpc>
+                <a:spcPct val="150000"/>
+              </a:lnSpc>
+              <a:buAutoNum type="arabicPeriod"/>
+            </a:pPr>
+            <a:r>
+              <a:rPr lang="en-US" altLang="ko-KR" sz="2800" dirty="0">
+                <a:solidFill>
+                  <a:schemeClr val="bg1"/>
+                </a:solidFill>
+                <a:latin typeface="+mn-ea"/>
+              </a:rPr>
+              <a:t>Width</a:t>
+            </a:r>
+            <a:r>
+              <a:rPr lang="ko-KR" altLang="en-US" sz="2800" dirty="0">
+                <a:solidFill>
+                  <a:schemeClr val="bg1"/>
+                </a:solidFill>
+                <a:latin typeface="+mn-ea"/>
+              </a:rPr>
+              <a:t> </a:t>
+            </a:r>
+            <a:r>
+              <a:rPr lang="en-US" altLang="ko-KR" sz="2800" dirty="0">
+                <a:solidFill>
+                  <a:schemeClr val="bg1"/>
+                </a:solidFill>
+                <a:latin typeface="+mn-ea"/>
+              </a:rPr>
+              <a:t>910px </a:t>
+            </a:r>
+            <a:r>
+              <a:rPr lang="ko-KR" altLang="en-US" sz="2800" dirty="0">
+                <a:solidFill>
+                  <a:schemeClr val="bg1"/>
+                </a:solidFill>
+                <a:latin typeface="+mn-ea"/>
+              </a:rPr>
+              <a:t>환경에서 헤더 부분의 로고가 오른쪽 사진처럼 바뀐다</a:t>
+            </a:r>
+            <a:r>
+              <a:rPr lang="en-US" altLang="ko-KR" sz="2800" dirty="0">
+                <a:solidFill>
+                  <a:schemeClr val="bg1"/>
+                </a:solidFill>
+                <a:latin typeface="+mn-ea"/>
+              </a:rPr>
+              <a:t>.</a:t>
+            </a:r>
+          </a:p>
+          <a:p>
+            <a:pPr marL="457200" indent="-457200">
+              <a:lnSpc>
+                <a:spcPct val="150000"/>
+              </a:lnSpc>
+              <a:buAutoNum type="arabicPeriod"/>
+            </a:pPr>
+            <a:r>
+              <a:rPr lang="en-US" altLang="ko-KR" sz="2800" dirty="0">
+                <a:solidFill>
+                  <a:schemeClr val="bg1"/>
+                </a:solidFill>
+                <a:latin typeface="+mn-ea"/>
+              </a:rPr>
+              <a:t>Width 910px </a:t>
+            </a:r>
+            <a:r>
+              <a:rPr lang="ko-KR" altLang="en-US" sz="2800" dirty="0">
+                <a:solidFill>
+                  <a:schemeClr val="bg1"/>
+                </a:solidFill>
+                <a:latin typeface="+mn-ea"/>
+              </a:rPr>
+              <a:t>이하 환경이 되어도 회원가입박스의 크기는 </a:t>
+            </a:r>
+            <a:r>
+              <a:rPr lang="ko-KR" altLang="en-US" sz="2800" dirty="0" err="1">
+                <a:solidFill>
+                  <a:schemeClr val="bg1"/>
+                </a:solidFill>
+                <a:latin typeface="+mn-ea"/>
+              </a:rPr>
+              <a:t>변하지않는다</a:t>
+            </a:r>
+            <a:r>
+              <a:rPr lang="en-US" altLang="ko-KR" sz="2800" dirty="0">
+                <a:solidFill>
+                  <a:schemeClr val="bg1"/>
+                </a:solidFill>
+                <a:latin typeface="+mn-ea"/>
+              </a:rPr>
+              <a:t>.</a:t>
+            </a:r>
+          </a:p>
+          <a:p>
+            <a:pPr marL="457200" indent="-457200">
+              <a:lnSpc>
+                <a:spcPct val="150000"/>
+              </a:lnSpc>
+              <a:buAutoNum type="arabicPeriod"/>
+            </a:pPr>
+            <a:r>
+              <a:rPr lang="ko-KR" altLang="en-US" sz="2800" dirty="0">
+                <a:solidFill>
+                  <a:schemeClr val="bg1"/>
+                </a:solidFill>
+                <a:latin typeface="+mn-ea"/>
+              </a:rPr>
+              <a:t>기존 배너색과 </a:t>
+            </a:r>
+            <a:r>
+              <a:rPr lang="en-US" altLang="ko-KR" sz="2800" dirty="0">
+                <a:solidFill>
+                  <a:schemeClr val="bg1"/>
+                </a:solidFill>
+                <a:latin typeface="+mn-ea"/>
+              </a:rPr>
+              <a:t>Width</a:t>
+            </a:r>
+            <a:r>
+              <a:rPr lang="ko-KR" altLang="en-US" sz="2800" dirty="0">
+                <a:solidFill>
+                  <a:schemeClr val="bg1"/>
+                </a:solidFill>
+                <a:latin typeface="+mn-ea"/>
+              </a:rPr>
+              <a:t> </a:t>
+            </a:r>
+            <a:r>
+              <a:rPr lang="en-US" altLang="ko-KR" sz="2800" dirty="0">
+                <a:solidFill>
+                  <a:schemeClr val="bg1"/>
+                </a:solidFill>
+                <a:latin typeface="+mn-ea"/>
+              </a:rPr>
+              <a:t>910px </a:t>
+            </a:r>
+            <a:r>
+              <a:rPr lang="ko-KR" altLang="en-US" sz="2800" dirty="0">
+                <a:solidFill>
+                  <a:schemeClr val="bg1"/>
+                </a:solidFill>
+                <a:latin typeface="+mn-ea"/>
+              </a:rPr>
+              <a:t>이하 환경의 배경색이 같기에 헤더의 색에 변화를 주었다</a:t>
+            </a:r>
+            <a:r>
+              <a:rPr lang="en-US" altLang="ko-KR" sz="2800" dirty="0">
+                <a:solidFill>
+                  <a:schemeClr val="bg1"/>
+                </a:solidFill>
+                <a:latin typeface="+mn-ea"/>
+              </a:rPr>
+              <a:t>.</a:t>
+            </a:r>
+          </a:p>
+          <a:p>
+            <a:pPr marL="457200" indent="-457200">
+              <a:lnSpc>
+                <a:spcPct val="150000"/>
+              </a:lnSpc>
+              <a:buAutoNum type="arabicPeriod"/>
+            </a:pPr>
+            <a:r>
+              <a:rPr lang="ko-KR" altLang="en-US" sz="2800" dirty="0">
+                <a:solidFill>
+                  <a:schemeClr val="bg1"/>
+                </a:solidFill>
+                <a:latin typeface="+mn-ea"/>
+              </a:rPr>
+              <a:t>헤더 영역 좌측에 햄버거 메뉴가 생긴다</a:t>
+            </a:r>
+            <a:r>
+              <a:rPr lang="en-US" altLang="ko-KR" sz="2800" dirty="0">
+                <a:solidFill>
+                  <a:schemeClr val="bg1"/>
+                </a:solidFill>
+                <a:latin typeface="+mn-ea"/>
+              </a:rPr>
+              <a:t>.</a:t>
+            </a:r>
+          </a:p>
+          <a:p>
+            <a:pPr marL="457200" indent="-457200">
+              <a:lnSpc>
+                <a:spcPct val="150000"/>
+              </a:lnSpc>
+              <a:buAutoNum type="arabicPeriod"/>
+            </a:pPr>
+            <a:r>
+              <a:rPr lang="ko-KR" altLang="en-US" sz="2800" dirty="0">
+                <a:solidFill>
+                  <a:schemeClr val="bg1"/>
+                </a:solidFill>
+                <a:latin typeface="+mn-ea"/>
+              </a:rPr>
+              <a:t>상단에 있는 </a:t>
+            </a:r>
+            <a:r>
+              <a:rPr lang="en-US" altLang="ko-KR" sz="2800" dirty="0">
+                <a:solidFill>
+                  <a:schemeClr val="bg1"/>
+                </a:solidFill>
+                <a:latin typeface="+mn-ea"/>
+              </a:rPr>
+              <a:t>‘Ubiquitous’</a:t>
+            </a:r>
+            <a:r>
+              <a:rPr lang="ko-KR" altLang="en-US" sz="2800" dirty="0">
+                <a:solidFill>
+                  <a:schemeClr val="bg1"/>
+                </a:solidFill>
+                <a:latin typeface="+mn-ea"/>
+              </a:rPr>
+              <a:t>로고를 누르면 </a:t>
+            </a:r>
+            <a:r>
+              <a:rPr lang="ko-KR" altLang="en-US" sz="2800" dirty="0" err="1">
+                <a:solidFill>
+                  <a:schemeClr val="bg1"/>
+                </a:solidFill>
+                <a:latin typeface="+mn-ea"/>
+              </a:rPr>
+              <a:t>메인페이지로</a:t>
+            </a:r>
+            <a:r>
+              <a:rPr lang="ko-KR" altLang="en-US" sz="2800" dirty="0">
+                <a:solidFill>
+                  <a:schemeClr val="bg1"/>
+                </a:solidFill>
+                <a:latin typeface="+mn-ea"/>
+              </a:rPr>
+              <a:t> 넘어간다</a:t>
+            </a:r>
+            <a:r>
+              <a:rPr lang="en-US" altLang="ko-KR" sz="2800" dirty="0">
+                <a:solidFill>
+                  <a:schemeClr val="bg1"/>
+                </a:solidFill>
+                <a:latin typeface="+mn-ea"/>
+              </a:rPr>
+              <a:t>.</a:t>
+            </a:r>
+          </a:p>
+        </p:txBody>
+      </p:sp>
+      <p:pic>
+        <p:nvPicPr>
+          <p:cNvPr id="3" name="그림 2">
+            <a:extLst>
+              <a:ext uri="{FF2B5EF4-FFF2-40B4-BE49-F238E27FC236}">
+                <a16:creationId xmlns:a16="http://schemas.microsoft.com/office/drawing/2014/main" id="{AA45A977-8B21-4FCE-90E0-FEEA3F2DE44C}"/>
+              </a:ext>
+            </a:extLst>
+          </p:cNvPr>
+          <p:cNvPicPr>
+            <a:picLocks noChangeAspect="1"/>
+          </p:cNvPicPr>
+          <p:nvPr/>
+        </p:nvPicPr>
+        <p:blipFill rotWithShape="1">
+          <a:blip r:embed="rId7"/>
+          <a:srcRect l="744" t="-1309" b="-1"/>
+          <a:stretch/>
+        </p:blipFill>
+        <p:spPr>
+          <a:xfrm>
+            <a:off x="7443965" y="3543300"/>
+            <a:ext cx="6458029" cy="7913833"/>
+          </a:xfrm>
+          <a:prstGeom prst="rect">
+            <a:avLst/>
+          </a:prstGeom>
+          <a:ln w="28575">
+            <a:solidFill>
+              <a:schemeClr val="bg1"/>
+            </a:solidFill>
+          </a:ln>
+        </p:spPr>
+      </p:pic>
+      <p:sp>
+        <p:nvSpPr>
+          <p:cNvPr id="22" name="화살표: 오른쪽 21">
+            <a:extLst>
+              <a:ext uri="{FF2B5EF4-FFF2-40B4-BE49-F238E27FC236}">
+                <a16:creationId xmlns:a16="http://schemas.microsoft.com/office/drawing/2014/main" id="{0C6BEB1C-EF58-418D-9329-1254BA02B91F}"/>
+              </a:ext>
+            </a:extLst>
+          </p:cNvPr>
+          <p:cNvSpPr/>
+          <p:nvPr/>
+        </p:nvSpPr>
+        <p:spPr>
+          <a:xfrm>
+            <a:off x="6726358" y="7390946"/>
+            <a:ext cx="681849" cy="580111"/>
+          </a:xfrm>
+          <a:prstGeom prst="rightArrow">
+            <a:avLst/>
+          </a:prstGeom>
+          <a:solidFill>
+            <a:srgbClr val="F79646"/>
+          </a:solidFill>
+          <a:ln>
+            <a:solidFill>
+              <a:srgbClr val="F79646"/>
+            </a:solidFill>
+          </a:ln>
+        </p:spPr>
+        <p:style>
+          <a:lnRef idx="0">
+            <a:scrgbClr r="0" g="0" b="0"/>
+          </a:lnRef>
+          <a:fillRef idx="0">
+            <a:scrgbClr r="0" g="0" b="0"/>
+          </a:fillRef>
+          <a:effectRef idx="0">
+            <a:scrgbClr r="0" g="0" b="0"/>
+          </a:effectRef>
+          <a:fontRef idx="minor">
+            <a:schemeClr val="lt1"/>
+          </a:fontRef>
+        </p:style>
+        <p:txBody>
+          <a:bodyPr rtlCol="0" anchor="ctr"/>
+          <a:lstStyle/>
+          <a:p>
+            <a:pPr algn="ctr"/>
+            <a:endParaRPr lang="ko-KR" altLang="en-US" dirty="0"/>
+          </a:p>
+        </p:txBody>
+      </p:sp>
+      <p:sp>
+        <p:nvSpPr>
+          <p:cNvPr id="25" name="TextBox 24">
+            <a:extLst>
+              <a:ext uri="{FF2B5EF4-FFF2-40B4-BE49-F238E27FC236}">
+                <a16:creationId xmlns:a16="http://schemas.microsoft.com/office/drawing/2014/main" id="{E7105961-62AE-493C-8BDC-DBC4E8F5E6BF}"/>
+              </a:ext>
+            </a:extLst>
+          </p:cNvPr>
+          <p:cNvSpPr txBox="1"/>
+          <p:nvPr/>
+        </p:nvSpPr>
+        <p:spPr>
+          <a:xfrm>
+            <a:off x="8235682" y="2878700"/>
+            <a:ext cx="5067041" cy="595035"/>
+          </a:xfrm>
+          <a:prstGeom prst="rect">
+            <a:avLst/>
+          </a:prstGeom>
+          <a:noFill/>
+          <a:ln w="38100">
+            <a:solidFill>
+              <a:srgbClr val="F79646"/>
+            </a:solidFill>
+          </a:ln>
+        </p:spPr>
+        <p:txBody>
+          <a:bodyPr wrap="square" rtlCol="0">
+            <a:spAutoFit/>
+          </a:bodyPr>
+          <a:lstStyle/>
+          <a:p>
+            <a:pPr algn="ctr">
+              <a:lnSpc>
+                <a:spcPct val="150000"/>
+              </a:lnSpc>
+            </a:pPr>
+            <a:r>
+              <a:rPr lang="en-US" altLang="ko-KR" sz="2500" dirty="0">
+                <a:solidFill>
+                  <a:schemeClr val="bg1"/>
+                </a:solidFill>
+                <a:latin typeface="+mn-ea"/>
+              </a:rPr>
+              <a:t>Width 910px</a:t>
+            </a:r>
+            <a:r>
+              <a:rPr lang="ko-KR" altLang="en-US" sz="2500" dirty="0">
+                <a:solidFill>
+                  <a:schemeClr val="bg1"/>
+                </a:solidFill>
+                <a:latin typeface="+mn-ea"/>
+              </a:rPr>
+              <a:t>이하</a:t>
+            </a:r>
+            <a:endParaRPr lang="en-US" altLang="ko-KR" sz="2500" dirty="0">
+              <a:solidFill>
+                <a:schemeClr val="bg1"/>
+              </a:solidFill>
+              <a:latin typeface="+mn-ea"/>
+            </a:endParaRPr>
+          </a:p>
+        </p:txBody>
+      </p:sp>
+    </p:spTree>
+    <p:extLst>
+      <p:ext uri="{BB962C8B-B14F-4D97-AF65-F5344CB8AC3E}">
+        <p14:creationId xmlns:p14="http://schemas.microsoft.com/office/powerpoint/2010/main" val="694554150"/>
       </p:ext>
     </p:extLst>
   </p:cSld>
